--- a/templates/abstract.pptx
+++ b/templates/abstract.pptx
@@ -1017,7 +1017,7 @@
       </p:grpSpPr>
       <p:sp>
         <p:nvSpPr>
-          <p:cNvPr id="2" name="Title 1">
+          <p:cNvPr id="2" name="title">
             <a:extLst>
               <a:ext uri="{FF2B5EF4-FFF2-40B4-BE49-F238E27FC236}">
                 <a16:creationId xmlns:a16="http://schemas.microsoft.com/office/drawing/2014/main" id="{415B3628-62D7-4A6D-A79F-34DE91DBA31E}"/>
@@ -1056,7 +1056,7 @@
       </p:sp>
       <p:sp>
         <p:nvSpPr>
-          <p:cNvPr id="9" name="Subtitle 2"/>
+          <p:cNvPr id="9" name="subtitle"/>
           <p:cNvSpPr>
             <a:spLocks noGrp="1"/>
           </p:cNvSpPr>
@@ -1166,7 +1166,7 @@
       </p:grpSpPr>
       <p:sp>
         <p:nvSpPr>
-          <p:cNvPr id="2" name="Title 1">
+          <p:cNvPr id="2" name="title">
             <a:extLst>
               <a:ext uri="{FF2B5EF4-FFF2-40B4-BE49-F238E27FC236}">
                 <a16:creationId xmlns:a16="http://schemas.microsoft.com/office/drawing/2014/main" id="{415B3628-62D7-4A6D-A79F-34DE91DBA31E}"/>
@@ -1390,7 +1390,7 @@
       </p:grpSpPr>
       <p:sp>
         <p:nvSpPr>
-          <p:cNvPr id="2" name="Title 1">
+          <p:cNvPr id="2" name="title">
             <a:extLst>
               <a:ext uri="{FF2B5EF4-FFF2-40B4-BE49-F238E27FC236}">
                 <a16:creationId xmlns:a16="http://schemas.microsoft.com/office/drawing/2014/main" id="{23A3821F-4537-4AE7-8829-C2E3AE60F6E1}"/>
@@ -1436,7 +1436,7 @@
       </p:sp>
       <p:sp>
         <p:nvSpPr>
-          <p:cNvPr id="3" name="Content Placeholder 3">
+          <p:cNvPr id="3" name="body">
             <a:extLst>
               <a:ext uri="{FF2B5EF4-FFF2-40B4-BE49-F238E27FC236}">
                 <a16:creationId xmlns:a16="http://schemas.microsoft.com/office/drawing/2014/main" id="{EAC9D25F-5B3D-F5B2-5D02-C6BC6AA8987B}"/>
@@ -1447,7 +1447,7 @@
             <a:spLocks noGrp="1"/>
           </p:cNvSpPr>
           <p:nvPr>
-            <p:ph sz="half" idx="1" hasCustomPrompt="1"/>
+            <p:ph type="body" sz="half" idx="1" hasCustomPrompt="1"/>
           </p:nvPr>
         </p:nvSpPr>
         <p:spPr>
@@ -1821,7 +1821,7 @@
       </p:grpSpPr>
       <p:sp>
         <p:nvSpPr>
-          <p:cNvPr id="2" name="Title 1">
+          <p:cNvPr id="2" name="title">
             <a:extLst>
               <a:ext uri="{FF2B5EF4-FFF2-40B4-BE49-F238E27FC236}">
                 <a16:creationId xmlns:a16="http://schemas.microsoft.com/office/drawing/2014/main" id="{415B3628-62D7-4A6D-A79F-34DE91DBA31E}"/>
@@ -1864,7 +1864,7 @@
       </p:sp>
       <p:sp>
         <p:nvSpPr>
-          <p:cNvPr id="3" name="Subtitle 2">
+          <p:cNvPr id="3" name="subtitle">
             <a:extLst>
               <a:ext uri="{FF2B5EF4-FFF2-40B4-BE49-F238E27FC236}">
                 <a16:creationId xmlns:a16="http://schemas.microsoft.com/office/drawing/2014/main" id="{55457758-A125-4CEA-A3D5-CBD010417BD2}"/>
